--- a/Apresentação/sql.pptx
+++ b/Apresentação/sql.pptx
@@ -33364,7 +33364,7 @@
         <p:spPr>
           <a:xfrm>
             <a:off x="799199" y="758782"/>
-            <a:ext cx="7880549" cy="1015663"/>
+            <a:ext cx="7880549" cy="1631216"/>
           </a:xfrm>
           <a:prstGeom prst="rect">
             <a:avLst/>
@@ -33426,8 +33426,46 @@
                 <a:latin typeface="Arial" panose="020B0604020202020204" pitchFamily="34" charset="0"/>
                 <a:cs typeface="Arial" panose="020B0604020202020204" pitchFamily="34" charset="0"/>
               </a:rPr>
-              <a:t>like</a:t>
-            </a:r>
+              <a:t>Like</a:t>
+            </a:r>
+          </a:p>
+          <a:p>
+            <a:r>
+              <a:rPr lang="pt-BR" sz="2000" dirty="0" err="1">
+                <a:solidFill>
+                  <a:schemeClr val="tx1"/>
+                </a:solidFill>
+                <a:latin typeface="Arial" panose="020B0604020202020204" pitchFamily="34" charset="0"/>
+                <a:cs typeface="Arial" panose="020B0604020202020204" pitchFamily="34" charset="0"/>
+              </a:rPr>
+              <a:t>Null</a:t>
+            </a:r>
+            <a:endParaRPr lang="pt-BR" sz="2000" dirty="0">
+              <a:solidFill>
+                <a:schemeClr val="tx1"/>
+              </a:solidFill>
+              <a:latin typeface="Arial" panose="020B0604020202020204" pitchFamily="34" charset="0"/>
+              <a:cs typeface="Arial" panose="020B0604020202020204" pitchFamily="34" charset="0"/>
+            </a:endParaRPr>
+          </a:p>
+          <a:p>
+            <a:r>
+              <a:rPr lang="pt-BR" sz="2000">
+                <a:solidFill>
+                  <a:schemeClr val="tx1"/>
+                </a:solidFill>
+                <a:latin typeface="Arial" panose="020B0604020202020204" pitchFamily="34" charset="0"/>
+                <a:cs typeface="Arial" panose="020B0604020202020204" pitchFamily="34" charset="0"/>
+              </a:rPr>
+              <a:t>agregação</a:t>
+            </a:r>
+            <a:endParaRPr lang="pt-BR" sz="2000" dirty="0">
+              <a:solidFill>
+                <a:schemeClr val="tx1"/>
+              </a:solidFill>
+              <a:latin typeface="Arial" panose="020B0604020202020204" pitchFamily="34" charset="0"/>
+              <a:cs typeface="Arial" panose="020B0604020202020204" pitchFamily="34" charset="0"/>
+            </a:endParaRPr>
           </a:p>
         </p:txBody>
       </p:sp>

--- a/Apresentação/sql.pptx
+++ b/Apresentação/sql.pptx
@@ -5,10 +5,10 @@
     <p:sldMasterId id="2147483666" r:id="rId1"/>
   </p:sldMasterIdLst>
   <p:notesMasterIdLst>
-    <p:notesMasterId r:id="rId57"/>
+    <p:notesMasterId r:id="rId60"/>
   </p:notesMasterIdLst>
   <p:handoutMasterIdLst>
-    <p:handoutMasterId r:id="rId58"/>
+    <p:handoutMasterId r:id="rId61"/>
   </p:handoutMasterIdLst>
   <p:sldIdLst>
     <p:sldId id="2526" r:id="rId2"/>
@@ -65,42 +65,45 @@
     <p:sldId id="3207" r:id="rId53"/>
     <p:sldId id="3208" r:id="rId54"/>
     <p:sldId id="3205" r:id="rId55"/>
-    <p:sldId id="3206" r:id="rId56"/>
+    <p:sldId id="3209" r:id="rId56"/>
+    <p:sldId id="3210" r:id="rId57"/>
+    <p:sldId id="3211" r:id="rId58"/>
+    <p:sldId id="3212" r:id="rId59"/>
   </p:sldIdLst>
   <p:sldSz cx="9144000" cy="5143500" type="screen16x9"/>
   <p:notesSz cx="6858000" cy="9945688"/>
   <p:embeddedFontLst>
     <p:embeddedFont>
       <p:font typeface="Arial Unicode MS" panose="020B0604020202020204" charset="-128"/>
-      <p:regular r:id="rId59"/>
+      <p:regular r:id="rId62"/>
     </p:embeddedFont>
     <p:embeddedFont>
       <p:font typeface="Consolas" panose="020B0609020204030204" pitchFamily="49" charset="0"/>
-      <p:regular r:id="rId60"/>
-      <p:bold r:id="rId61"/>
-      <p:italic r:id="rId62"/>
-      <p:boldItalic r:id="rId63"/>
+      <p:regular r:id="rId63"/>
+      <p:bold r:id="rId64"/>
+      <p:italic r:id="rId65"/>
+      <p:boldItalic r:id="rId66"/>
     </p:embeddedFont>
     <p:embeddedFont>
       <p:font typeface="Roboto" panose="02000000000000000000" pitchFamily="2" charset="0"/>
-      <p:regular r:id="rId64"/>
-      <p:bold r:id="rId65"/>
-      <p:italic r:id="rId66"/>
-      <p:boldItalic r:id="rId67"/>
+      <p:regular r:id="rId67"/>
+      <p:bold r:id="rId68"/>
+      <p:italic r:id="rId69"/>
+      <p:boldItalic r:id="rId70"/>
     </p:embeddedFont>
     <p:embeddedFont>
       <p:font typeface="Times" panose="02020603050405020304" pitchFamily="18" charset="0"/>
-      <p:regular r:id="rId68"/>
-      <p:bold r:id="rId69"/>
-      <p:italic r:id="rId70"/>
-      <p:boldItalic r:id="rId71"/>
+      <p:regular r:id="rId71"/>
+      <p:bold r:id="rId72"/>
+      <p:italic r:id="rId73"/>
+      <p:boldItalic r:id="rId74"/>
     </p:embeddedFont>
     <p:embeddedFont>
       <p:font typeface="Verdana" panose="020B0604030504040204" pitchFamily="34" charset="0"/>
-      <p:regular r:id="rId72"/>
-      <p:bold r:id="rId73"/>
-      <p:italic r:id="rId74"/>
-      <p:boldItalic r:id="rId75"/>
+      <p:regular r:id="rId75"/>
+      <p:bold r:id="rId76"/>
+      <p:italic r:id="rId77"/>
+      <p:boldItalic r:id="rId78"/>
     </p:embeddedFont>
   </p:embeddedFontLst>
   <p:defaultTextStyle>
@@ -391,7 +394,10 @@
             <p14:sldId id="3207"/>
             <p14:sldId id="3208"/>
             <p14:sldId id="3205"/>
-            <p14:sldId id="3206"/>
+            <p14:sldId id="3209"/>
+            <p14:sldId id="3210"/>
+            <p14:sldId id="3211"/>
+            <p14:sldId id="3212"/>
           </p14:sldIdLst>
         </p14:section>
       </p14:sectionLst>
@@ -33270,7 +33276,7 @@
         <p:cNvPr id="1" name="">
           <a:extLst>
             <a:ext uri="{FF2B5EF4-FFF2-40B4-BE49-F238E27FC236}">
-              <a16:creationId xmlns:a16="http://schemas.microsoft.com/office/drawing/2014/main" id="{19D6B4DA-F73F-923B-6A73-91B600305AA0}"/>
+              <a16:creationId xmlns:a16="http://schemas.microsoft.com/office/drawing/2014/main" id="{96E8D963-04AF-3D22-5244-7F667458D12D}"/>
             </a:ext>
           </a:extLst>
         </p:cNvPr>
@@ -33290,7 +33296,7 @@
           <p:cNvPr id="19" name="CaixaDeTexto 18">
             <a:extLst>
               <a:ext uri="{FF2B5EF4-FFF2-40B4-BE49-F238E27FC236}">
-                <a16:creationId xmlns:a16="http://schemas.microsoft.com/office/drawing/2014/main" id="{3389A7C3-425D-9E7F-4824-CF35601E37C4}"/>
+                <a16:creationId xmlns:a16="http://schemas.microsoft.com/office/drawing/2014/main" id="{3F85FD7E-BA5B-962C-A36B-C57E71FC7393}"/>
               </a:ext>
             </a:extLst>
           </p:cNvPr>
@@ -33354,7 +33360,7 @@
           <p:cNvPr id="6" name="CaixaDeTexto 5">
             <a:extLst>
               <a:ext uri="{FF2B5EF4-FFF2-40B4-BE49-F238E27FC236}">
-                <a16:creationId xmlns:a16="http://schemas.microsoft.com/office/drawing/2014/main" id="{6CF13C3E-FD13-D7CE-29C8-D83D89E13A0B}"/>
+                <a16:creationId xmlns:a16="http://schemas.microsoft.com/office/drawing/2014/main" id="{8387394E-BA69-AB86-8FA1-6AE54C324A51}"/>
               </a:ext>
             </a:extLst>
           </p:cNvPr>
@@ -33364,7 +33370,7 @@
         <p:spPr>
           <a:xfrm>
             <a:off x="799199" y="758782"/>
-            <a:ext cx="7880549" cy="1631216"/>
+            <a:ext cx="7880549" cy="3477875"/>
           </a:xfrm>
           <a:prstGeom prst="rect">
             <a:avLst/>
@@ -33377,16 +33383,20 @@
           </a:bodyPr>
           <a:lstStyle/>
           <a:p>
-            <a:r>
-              <a:rPr lang="pt-BR" sz="2000" dirty="0" err="1">
+            <a:pPr algn="just"/>
+            <a:r>
+              <a:rPr lang="pt-BR" sz="2000" dirty="0">
                 <a:solidFill>
                   <a:schemeClr val="tx1"/>
                 </a:solidFill>
                 <a:latin typeface="Arial" panose="020B0604020202020204" pitchFamily="34" charset="0"/>
                 <a:cs typeface="Arial" panose="020B0604020202020204" pitchFamily="34" charset="0"/>
               </a:rPr>
-              <a:t>distinct</a:t>
-            </a:r>
+              <a:t>Apesar de ter sua estrutura rígida o comando SELECT nos oferece algumas facilidade para ajudar no nosso dia a dia, entre elas temos:</a:t>
+            </a:r>
+          </a:p>
+          <a:p>
+            <a:pPr algn="just"/>
             <a:endParaRPr lang="pt-BR" sz="2000" dirty="0">
               <a:solidFill>
                 <a:schemeClr val="tx1"/>
@@ -33396,6 +33406,17 @@
             </a:endParaRPr>
           </a:p>
           <a:p>
+            <a:pPr algn="just"/>
+            <a:r>
+              <a:rPr lang="pt-BR" sz="2000" dirty="0">
+                <a:solidFill>
+                  <a:schemeClr val="tx1"/>
+                </a:solidFill>
+                <a:latin typeface="Arial" panose="020B0604020202020204" pitchFamily="34" charset="0"/>
+                <a:cs typeface="Arial" panose="020B0604020202020204" pitchFamily="34" charset="0"/>
+              </a:rPr>
+              <a:t>A clausula DISTINCT, esta clausula colocada após a palavra </a:t>
+            </a:r>
             <a:r>
               <a:rPr lang="pt-BR" sz="2000" dirty="0" err="1">
                 <a:solidFill>
@@ -33404,7 +33425,7 @@
                 <a:latin typeface="Arial" panose="020B0604020202020204" pitchFamily="34" charset="0"/>
                 <a:cs typeface="Arial" panose="020B0604020202020204" pitchFamily="34" charset="0"/>
               </a:rPr>
-              <a:t>Rename</a:t>
+              <a:t>select</a:t>
             </a:r>
             <a:r>
               <a:rPr lang="pt-BR" sz="2000" dirty="0">
@@ -33414,32 +33435,11 @@
                 <a:latin typeface="Arial" panose="020B0604020202020204" pitchFamily="34" charset="0"/>
                 <a:cs typeface="Arial" panose="020B0604020202020204" pitchFamily="34" charset="0"/>
               </a:rPr>
-              <a:t>  colunas</a:t>
-            </a:r>
-          </a:p>
-          <a:p>
-            <a:r>
-              <a:rPr lang="pt-BR" sz="2000" dirty="0">
-                <a:solidFill>
-                  <a:schemeClr val="tx1"/>
-                </a:solidFill>
-                <a:latin typeface="Arial" panose="020B0604020202020204" pitchFamily="34" charset="0"/>
-                <a:cs typeface="Arial" panose="020B0604020202020204" pitchFamily="34" charset="0"/>
-              </a:rPr>
-              <a:t>Like</a:t>
-            </a:r>
-          </a:p>
-          <a:p>
-            <a:r>
-              <a:rPr lang="pt-BR" sz="2000" dirty="0" err="1">
-                <a:solidFill>
-                  <a:schemeClr val="tx1"/>
-                </a:solidFill>
-                <a:latin typeface="Arial" panose="020B0604020202020204" pitchFamily="34" charset="0"/>
-                <a:cs typeface="Arial" panose="020B0604020202020204" pitchFamily="34" charset="0"/>
-              </a:rPr>
-              <a:t>Null</a:t>
-            </a:r>
+              <a:t> e antes da lista de colunas a serem apresentada faz com que linhas repetidas sejam excluídas deixando apena a primeira ocorrência delas</a:t>
+            </a:r>
+          </a:p>
+          <a:p>
+            <a:pPr algn="just"/>
             <a:endParaRPr lang="pt-BR" sz="2000" dirty="0">
               <a:solidFill>
                 <a:schemeClr val="tx1"/>
@@ -33449,16 +33449,263 @@
             </a:endParaRPr>
           </a:p>
           <a:p>
-            <a:r>
-              <a:rPr lang="pt-BR" sz="2000">
+            <a:pPr algn="just"/>
+            <a:r>
+              <a:rPr lang="pt-BR" sz="2000" dirty="0">
                 <a:solidFill>
                   <a:schemeClr val="tx1"/>
                 </a:solidFill>
                 <a:latin typeface="Arial" panose="020B0604020202020204" pitchFamily="34" charset="0"/>
                 <a:cs typeface="Arial" panose="020B0604020202020204" pitchFamily="34" charset="0"/>
               </a:rPr>
-              <a:t>agregação</a:t>
-            </a:r>
+              <a:t>Podemos utilizar o conector AS para renomear colunas ou tabelas dentro do nosso SELECT facilitando o entendimento da saída do comando</a:t>
+            </a:r>
+          </a:p>
+        </p:txBody>
+      </p:sp>
+    </p:spTree>
+    <p:extLst>
+      <p:ext uri="{BB962C8B-B14F-4D97-AF65-F5344CB8AC3E}">
+        <p14:creationId xmlns:p14="http://schemas.microsoft.com/office/powerpoint/2010/main" val="1388788578"/>
+      </p:ext>
+    </p:extLst>
+  </p:cSld>
+  <p:clrMapOvr>
+    <a:masterClrMapping/>
+  </p:clrMapOvr>
+  <p:timing>
+    <p:tnLst>
+      <p:par>
+        <p:cTn id="1" dur="indefinite" restart="never" nodeType="tmRoot">
+          <p:childTnLst>
+            <p:seq concurrent="1" nextAc="seek">
+              <p:cTn id="2" dur="indefinite" nodeType="mainSeq">
+                <p:childTnLst>
+                  <p:par>
+                    <p:cTn id="3" fill="hold">
+                      <p:stCondLst>
+                        <p:cond delay="indefinite"/>
+                        <p:cond evt="onBegin" delay="0">
+                          <p:tn val="2"/>
+                        </p:cond>
+                      </p:stCondLst>
+                      <p:childTnLst>
+                        <p:par>
+                          <p:cTn id="4" fill="hold">
+                            <p:stCondLst>
+                              <p:cond delay="0"/>
+                            </p:stCondLst>
+                            <p:childTnLst>
+                              <p:par>
+                                <p:cTn id="5" presetID="1" presetClass="entr" presetSubtype="0" fill="hold" grpId="0" nodeType="withEffect">
+                                  <p:stCondLst>
+                                    <p:cond delay="0"/>
+                                  </p:stCondLst>
+                                  <p:childTnLst>
+                                    <p:set>
+                                      <p:cBhvr>
+                                        <p:cTn id="6" dur="1" fill="hold">
+                                          <p:stCondLst>
+                                            <p:cond delay="0"/>
+                                          </p:stCondLst>
+                                        </p:cTn>
+                                        <p:tgtEl>
+                                          <p:spTgt spid="6"/>
+                                        </p:tgtEl>
+                                        <p:attrNameLst>
+                                          <p:attrName>style.visibility</p:attrName>
+                                        </p:attrNameLst>
+                                      </p:cBhvr>
+                                      <p:to>
+                                        <p:strVal val="visible"/>
+                                      </p:to>
+                                    </p:set>
+                                  </p:childTnLst>
+                                </p:cTn>
+                              </p:par>
+                            </p:childTnLst>
+                          </p:cTn>
+                        </p:par>
+                      </p:childTnLst>
+                    </p:cTn>
+                  </p:par>
+                </p:childTnLst>
+              </p:cTn>
+              <p:prevCondLst>
+                <p:cond evt="onPrev" delay="0">
+                  <p:tgtEl>
+                    <p:sldTgt/>
+                  </p:tgtEl>
+                </p:cond>
+              </p:prevCondLst>
+              <p:nextCondLst>
+                <p:cond evt="onNext" delay="0">
+                  <p:tgtEl>
+                    <p:sldTgt/>
+                  </p:tgtEl>
+                </p:cond>
+              </p:nextCondLst>
+            </p:seq>
+          </p:childTnLst>
+        </p:cTn>
+      </p:par>
+    </p:tnLst>
+    <p:bldLst>
+      <p:bldP spid="6" grpId="0"/>
+    </p:bldLst>
+  </p:timing>
+</p:sld>
+</file>
+
+<file path=ppt/slides/slide56.xml><?xml version="1.0" encoding="utf-8"?>
+<p:sld xmlns:a="http://schemas.openxmlformats.org/drawingml/2006/main" xmlns:r="http://schemas.openxmlformats.org/officeDocument/2006/relationships" xmlns:p="http://schemas.openxmlformats.org/presentationml/2006/main">
+  <p:cSld>
+    <p:spTree>
+      <p:nvGrpSpPr>
+        <p:cNvPr id="1" name="">
+          <a:extLst>
+            <a:ext uri="{FF2B5EF4-FFF2-40B4-BE49-F238E27FC236}">
+              <a16:creationId xmlns:a16="http://schemas.microsoft.com/office/drawing/2014/main" id="{8ED7CFA8-4B53-B2A7-8A48-485CAB765EEA}"/>
+            </a:ext>
+          </a:extLst>
+        </p:cNvPr>
+        <p:cNvGrpSpPr/>
+        <p:nvPr/>
+      </p:nvGrpSpPr>
+      <p:grpSpPr>
+        <a:xfrm>
+          <a:off x="0" y="0"/>
+          <a:ext cx="0" cy="0"/>
+          <a:chOff x="0" y="0"/>
+          <a:chExt cx="0" cy="0"/>
+        </a:xfrm>
+      </p:grpSpPr>
+      <p:sp>
+        <p:nvSpPr>
+          <p:cNvPr id="19" name="CaixaDeTexto 18">
+            <a:extLst>
+              <a:ext uri="{FF2B5EF4-FFF2-40B4-BE49-F238E27FC236}">
+                <a16:creationId xmlns:a16="http://schemas.microsoft.com/office/drawing/2014/main" id="{B84064CC-DB3A-E3DA-BA8D-C87D65B05079}"/>
+              </a:ext>
+            </a:extLst>
+          </p:cNvPr>
+          <p:cNvSpPr txBox="1"/>
+          <p:nvPr/>
+        </p:nvSpPr>
+        <p:spPr>
+          <a:xfrm>
+            <a:off x="955954" y="101183"/>
+            <a:ext cx="7567041" cy="461665"/>
+          </a:xfrm>
+          <a:prstGeom prst="rect">
+            <a:avLst/>
+          </a:prstGeom>
+          <a:noFill/>
+        </p:spPr>
+        <p:txBody>
+          <a:bodyPr wrap="square">
+            <a:spAutoFit/>
+          </a:bodyPr>
+          <a:lstStyle/>
+          <a:p>
+            <a:r>
+              <a:rPr lang="en-US" sz="2400" b="1" i="1" dirty="0">
+                <a:solidFill>
+                  <a:srgbClr val="0033CC"/>
+                </a:solidFill>
+                <a:latin typeface="Verdana" panose="020B0604030504040204" pitchFamily="34" charset="0"/>
+              </a:rPr>
+              <a:t>O </a:t>
+            </a:r>
+            <a:r>
+              <a:rPr lang="en-US" sz="2400" b="1" i="1" dirty="0" err="1">
+                <a:solidFill>
+                  <a:srgbClr val="0033CC"/>
+                </a:solidFill>
+                <a:latin typeface="Verdana" panose="020B0604030504040204" pitchFamily="34" charset="0"/>
+              </a:rPr>
+              <a:t>Comando</a:t>
+            </a:r>
+            <a:r>
+              <a:rPr lang="en-US" sz="2400" b="1" i="1" dirty="0">
+                <a:solidFill>
+                  <a:srgbClr val="0033CC"/>
+                </a:solidFill>
+                <a:latin typeface="Verdana" panose="020B0604030504040204" pitchFamily="34" charset="0"/>
+              </a:rPr>
+              <a:t> SELECT</a:t>
+            </a:r>
+            <a:endParaRPr lang="pt-BR" sz="2400" b="1" i="1" dirty="0">
+              <a:solidFill>
+                <a:srgbClr val="0033CC"/>
+              </a:solidFill>
+              <a:latin typeface="Verdana" panose="020B0604030504040204" pitchFamily="34" charset="0"/>
+            </a:endParaRPr>
+          </a:p>
+        </p:txBody>
+      </p:sp>
+      <p:sp>
+        <p:nvSpPr>
+          <p:cNvPr id="6" name="CaixaDeTexto 5">
+            <a:extLst>
+              <a:ext uri="{FF2B5EF4-FFF2-40B4-BE49-F238E27FC236}">
+                <a16:creationId xmlns:a16="http://schemas.microsoft.com/office/drawing/2014/main" id="{37DA0C69-FBDA-A553-CE44-47A11E64B910}"/>
+              </a:ext>
+            </a:extLst>
+          </p:cNvPr>
+          <p:cNvSpPr txBox="1"/>
+          <p:nvPr/>
+        </p:nvSpPr>
+        <p:spPr>
+          <a:xfrm>
+            <a:off x="799199" y="758782"/>
+            <a:ext cx="7880549" cy="3170099"/>
+          </a:xfrm>
+          <a:prstGeom prst="rect">
+            <a:avLst/>
+          </a:prstGeom>
+          <a:noFill/>
+        </p:spPr>
+        <p:txBody>
+          <a:bodyPr wrap="square">
+            <a:spAutoFit/>
+          </a:bodyPr>
+          <a:lstStyle/>
+          <a:p>
+            <a:pPr algn="just"/>
+            <a:r>
+              <a:rPr lang="pt-BR" sz="2000" dirty="0">
+                <a:solidFill>
+                  <a:schemeClr val="tx1"/>
+                </a:solidFill>
+                <a:latin typeface="Arial" panose="020B0604020202020204" pitchFamily="34" charset="0"/>
+                <a:cs typeface="Arial" panose="020B0604020202020204" pitchFamily="34" charset="0"/>
+              </a:rPr>
+              <a:t>Para colunas do tipo </a:t>
+            </a:r>
+            <a:r>
+              <a:rPr lang="pt-BR" sz="2000" dirty="0" err="1">
+                <a:solidFill>
+                  <a:schemeClr val="tx1"/>
+                </a:solidFill>
+                <a:latin typeface="Arial" panose="020B0604020202020204" pitchFamily="34" charset="0"/>
+                <a:cs typeface="Arial" panose="020B0604020202020204" pitchFamily="34" charset="0"/>
+              </a:rPr>
+              <a:t>string</a:t>
+            </a:r>
+            <a:r>
+              <a:rPr lang="pt-BR" sz="2000" dirty="0">
+                <a:solidFill>
+                  <a:schemeClr val="tx1"/>
+                </a:solidFill>
+                <a:latin typeface="Arial" panose="020B0604020202020204" pitchFamily="34" charset="0"/>
+                <a:cs typeface="Arial" panose="020B0604020202020204" pitchFamily="34" charset="0"/>
+              </a:rPr>
+              <a:t> podemos utilizar o operador LIKE par fazer busca por padrão, este operador utiliza de 2 caracteres como curinga o caractere ‘%’ que significa qualquer quantidade de caracteres e o caractere ‘_’ que significa um e somente um caractere.</a:t>
+            </a:r>
+          </a:p>
+          <a:p>
+            <a:pPr algn="just"/>
             <a:endParaRPr lang="pt-BR" sz="2000" dirty="0">
               <a:solidFill>
                 <a:schemeClr val="tx1"/>
@@ -33467,12 +33714,603 @@
               <a:cs typeface="Arial" panose="020B0604020202020204" pitchFamily="34" charset="0"/>
             </a:endParaRPr>
           </a:p>
+          <a:p>
+            <a:pPr algn="just"/>
+            <a:r>
+              <a:rPr lang="pt-BR" sz="2000" dirty="0">
+                <a:solidFill>
+                  <a:schemeClr val="tx1"/>
+                </a:solidFill>
+                <a:latin typeface="Arial" panose="020B0604020202020204" pitchFamily="34" charset="0"/>
+                <a:cs typeface="Arial" panose="020B0604020202020204" pitchFamily="34" charset="0"/>
+              </a:rPr>
+              <a:t>Trabalhar com valores nulos precisam sempre de atenção para isso o SELECT nos traz as constantes IS NULL e IS NOT NULL que devemos utilizar sempre que queremos saber se uma coluna é ou não é nula.</a:t>
+            </a:r>
+          </a:p>
         </p:txBody>
       </p:sp>
     </p:spTree>
     <p:extLst>
       <p:ext uri="{BB962C8B-B14F-4D97-AF65-F5344CB8AC3E}">
-        <p14:creationId xmlns:p14="http://schemas.microsoft.com/office/powerpoint/2010/main" val="361212503"/>
+        <p14:creationId xmlns:p14="http://schemas.microsoft.com/office/powerpoint/2010/main" val="4195460999"/>
+      </p:ext>
+    </p:extLst>
+  </p:cSld>
+  <p:clrMapOvr>
+    <a:masterClrMapping/>
+  </p:clrMapOvr>
+  <p:timing>
+    <p:tnLst>
+      <p:par>
+        <p:cTn id="1" dur="indefinite" restart="never" nodeType="tmRoot">
+          <p:childTnLst>
+            <p:seq concurrent="1" nextAc="seek">
+              <p:cTn id="2" dur="indefinite" nodeType="mainSeq">
+                <p:childTnLst>
+                  <p:par>
+                    <p:cTn id="3" fill="hold">
+                      <p:stCondLst>
+                        <p:cond delay="indefinite"/>
+                        <p:cond evt="onBegin" delay="0">
+                          <p:tn val="2"/>
+                        </p:cond>
+                      </p:stCondLst>
+                      <p:childTnLst>
+                        <p:par>
+                          <p:cTn id="4" fill="hold">
+                            <p:stCondLst>
+                              <p:cond delay="0"/>
+                            </p:stCondLst>
+                            <p:childTnLst>
+                              <p:par>
+                                <p:cTn id="5" presetID="1" presetClass="entr" presetSubtype="0" fill="hold" grpId="0" nodeType="withEffect">
+                                  <p:stCondLst>
+                                    <p:cond delay="0"/>
+                                  </p:stCondLst>
+                                  <p:childTnLst>
+                                    <p:set>
+                                      <p:cBhvr>
+                                        <p:cTn id="6" dur="1" fill="hold">
+                                          <p:stCondLst>
+                                            <p:cond delay="0"/>
+                                          </p:stCondLst>
+                                        </p:cTn>
+                                        <p:tgtEl>
+                                          <p:spTgt spid="6"/>
+                                        </p:tgtEl>
+                                        <p:attrNameLst>
+                                          <p:attrName>style.visibility</p:attrName>
+                                        </p:attrNameLst>
+                                      </p:cBhvr>
+                                      <p:to>
+                                        <p:strVal val="visible"/>
+                                      </p:to>
+                                    </p:set>
+                                  </p:childTnLst>
+                                </p:cTn>
+                              </p:par>
+                            </p:childTnLst>
+                          </p:cTn>
+                        </p:par>
+                      </p:childTnLst>
+                    </p:cTn>
+                  </p:par>
+                </p:childTnLst>
+              </p:cTn>
+              <p:prevCondLst>
+                <p:cond evt="onPrev" delay="0">
+                  <p:tgtEl>
+                    <p:sldTgt/>
+                  </p:tgtEl>
+                </p:cond>
+              </p:prevCondLst>
+              <p:nextCondLst>
+                <p:cond evt="onNext" delay="0">
+                  <p:tgtEl>
+                    <p:sldTgt/>
+                  </p:tgtEl>
+                </p:cond>
+              </p:nextCondLst>
+            </p:seq>
+          </p:childTnLst>
+        </p:cTn>
+      </p:par>
+    </p:tnLst>
+    <p:bldLst>
+      <p:bldP spid="6" grpId="0"/>
+    </p:bldLst>
+  </p:timing>
+</p:sld>
+</file>
+
+<file path=ppt/slides/slide57.xml><?xml version="1.0" encoding="utf-8"?>
+<p:sld xmlns:a="http://schemas.openxmlformats.org/drawingml/2006/main" xmlns:r="http://schemas.openxmlformats.org/officeDocument/2006/relationships" xmlns:p="http://schemas.openxmlformats.org/presentationml/2006/main">
+  <p:cSld>
+    <p:spTree>
+      <p:nvGrpSpPr>
+        <p:cNvPr id="1" name="">
+          <a:extLst>
+            <a:ext uri="{FF2B5EF4-FFF2-40B4-BE49-F238E27FC236}">
+              <a16:creationId xmlns:a16="http://schemas.microsoft.com/office/drawing/2014/main" id="{EBA516D0-57E8-641D-168D-45AFFB94D04D}"/>
+            </a:ext>
+          </a:extLst>
+        </p:cNvPr>
+        <p:cNvGrpSpPr/>
+        <p:nvPr/>
+      </p:nvGrpSpPr>
+      <p:grpSpPr>
+        <a:xfrm>
+          <a:off x="0" y="0"/>
+          <a:ext cx="0" cy="0"/>
+          <a:chOff x="0" y="0"/>
+          <a:chExt cx="0" cy="0"/>
+        </a:xfrm>
+      </p:grpSpPr>
+      <p:sp>
+        <p:nvSpPr>
+          <p:cNvPr id="19" name="CaixaDeTexto 18">
+            <a:extLst>
+              <a:ext uri="{FF2B5EF4-FFF2-40B4-BE49-F238E27FC236}">
+                <a16:creationId xmlns:a16="http://schemas.microsoft.com/office/drawing/2014/main" id="{97350E99-903D-CFE5-EE18-C932F9846F4A}"/>
+              </a:ext>
+            </a:extLst>
+          </p:cNvPr>
+          <p:cNvSpPr txBox="1"/>
+          <p:nvPr/>
+        </p:nvSpPr>
+        <p:spPr>
+          <a:xfrm>
+            <a:off x="955954" y="101183"/>
+            <a:ext cx="7567041" cy="461665"/>
+          </a:xfrm>
+          <a:prstGeom prst="rect">
+            <a:avLst/>
+          </a:prstGeom>
+          <a:noFill/>
+        </p:spPr>
+        <p:txBody>
+          <a:bodyPr wrap="square">
+            <a:spAutoFit/>
+          </a:bodyPr>
+          <a:lstStyle/>
+          <a:p>
+            <a:r>
+              <a:rPr lang="en-US" sz="2400" b="1" i="1" dirty="0">
+                <a:solidFill>
+                  <a:srgbClr val="0033CC"/>
+                </a:solidFill>
+                <a:latin typeface="Verdana" panose="020B0604030504040204" pitchFamily="34" charset="0"/>
+              </a:rPr>
+              <a:t>O </a:t>
+            </a:r>
+            <a:r>
+              <a:rPr lang="en-US" sz="2400" b="1" i="1" dirty="0" err="1">
+                <a:solidFill>
+                  <a:srgbClr val="0033CC"/>
+                </a:solidFill>
+                <a:latin typeface="Verdana" panose="020B0604030504040204" pitchFamily="34" charset="0"/>
+              </a:rPr>
+              <a:t>Comando</a:t>
+            </a:r>
+            <a:r>
+              <a:rPr lang="en-US" sz="2400" b="1" i="1" dirty="0">
+                <a:solidFill>
+                  <a:srgbClr val="0033CC"/>
+                </a:solidFill>
+                <a:latin typeface="Verdana" panose="020B0604030504040204" pitchFamily="34" charset="0"/>
+              </a:rPr>
+              <a:t> SELECT</a:t>
+            </a:r>
+            <a:endParaRPr lang="pt-BR" sz="2400" b="1" i="1" dirty="0">
+              <a:solidFill>
+                <a:srgbClr val="0033CC"/>
+              </a:solidFill>
+              <a:latin typeface="Verdana" panose="020B0604030504040204" pitchFamily="34" charset="0"/>
+            </a:endParaRPr>
+          </a:p>
+        </p:txBody>
+      </p:sp>
+      <p:sp>
+        <p:nvSpPr>
+          <p:cNvPr id="6" name="CaixaDeTexto 5">
+            <a:extLst>
+              <a:ext uri="{FF2B5EF4-FFF2-40B4-BE49-F238E27FC236}">
+                <a16:creationId xmlns:a16="http://schemas.microsoft.com/office/drawing/2014/main" id="{4700220A-5F24-C44F-F5CF-7F152FF8F0C7}"/>
+              </a:ext>
+            </a:extLst>
+          </p:cNvPr>
+          <p:cNvSpPr txBox="1"/>
+          <p:nvPr/>
+        </p:nvSpPr>
+        <p:spPr>
+          <a:xfrm>
+            <a:off x="799199" y="758782"/>
+            <a:ext cx="7880549" cy="4093428"/>
+          </a:xfrm>
+          <a:prstGeom prst="rect">
+            <a:avLst/>
+          </a:prstGeom>
+          <a:noFill/>
+        </p:spPr>
+        <p:txBody>
+          <a:bodyPr wrap="square">
+            <a:spAutoFit/>
+          </a:bodyPr>
+          <a:lstStyle/>
+          <a:p>
+            <a:pPr algn="just"/>
+            <a:r>
+              <a:rPr lang="pt-BR" sz="2000" dirty="0">
+                <a:solidFill>
+                  <a:schemeClr val="tx1"/>
+                </a:solidFill>
+                <a:latin typeface="Arial" panose="020B0604020202020204" pitchFamily="34" charset="0"/>
+                <a:cs typeface="Arial" panose="020B0604020202020204" pitchFamily="34" charset="0"/>
+              </a:rPr>
+              <a:t>Agregações de informações sempre são importantes, especialmente quando queremos fazer análises, o SQL padrão nos traz as funções MIN(), MAX(), SUM(), AVG() e COUNT() para trabalhar essas análises.</a:t>
+            </a:r>
+          </a:p>
+          <a:p>
+            <a:pPr algn="just"/>
+            <a:endParaRPr lang="pt-BR" sz="2000" dirty="0">
+              <a:solidFill>
+                <a:schemeClr val="tx1"/>
+              </a:solidFill>
+              <a:latin typeface="Arial" panose="020B0604020202020204" pitchFamily="34" charset="0"/>
+              <a:cs typeface="Arial" panose="020B0604020202020204" pitchFamily="34" charset="0"/>
+            </a:endParaRPr>
+          </a:p>
+          <a:p>
+            <a:pPr algn="just"/>
+            <a:r>
+              <a:rPr lang="pt-BR" sz="2000" dirty="0">
+                <a:solidFill>
+                  <a:schemeClr val="tx1"/>
+                </a:solidFill>
+                <a:latin typeface="Arial" panose="020B0604020202020204" pitchFamily="34" charset="0"/>
+                <a:cs typeface="Arial" panose="020B0604020202020204" pitchFamily="34" charset="0"/>
+              </a:rPr>
+              <a:t>Eventualmente queremos saber não só se a informação está </a:t>
+            </a:r>
+            <a:r>
+              <a:rPr lang="pt-BR" sz="2000" dirty="0" err="1">
+                <a:solidFill>
+                  <a:schemeClr val="tx1"/>
+                </a:solidFill>
+                <a:latin typeface="Arial" panose="020B0604020202020204" pitchFamily="34" charset="0"/>
+                <a:cs typeface="Arial" panose="020B0604020202020204" pitchFamily="34" charset="0"/>
+              </a:rPr>
+              <a:t>ma</a:t>
+            </a:r>
+            <a:r>
+              <a:rPr lang="pt-BR" sz="2000" dirty="0">
+                <a:solidFill>
+                  <a:schemeClr val="tx1"/>
+                </a:solidFill>
+                <a:latin typeface="Arial" panose="020B0604020202020204" pitchFamily="34" charset="0"/>
+                <a:cs typeface="Arial" panose="020B0604020202020204" pitchFamily="34" charset="0"/>
+              </a:rPr>
+              <a:t> lista mas outras comparações para isso ainda temos os operadores ANY, SOME, ALL </a:t>
+            </a:r>
+          </a:p>
+          <a:p>
+            <a:pPr algn="just"/>
+            <a:endParaRPr lang="pt-BR" sz="2000" dirty="0">
+              <a:solidFill>
+                <a:schemeClr val="tx1"/>
+              </a:solidFill>
+              <a:latin typeface="Arial" panose="020B0604020202020204" pitchFamily="34" charset="0"/>
+              <a:cs typeface="Arial" panose="020B0604020202020204" pitchFamily="34" charset="0"/>
+            </a:endParaRPr>
+          </a:p>
+          <a:p>
+            <a:pPr algn="just"/>
+            <a:r>
+              <a:rPr lang="pt-BR" sz="2000" dirty="0">
+                <a:solidFill>
+                  <a:schemeClr val="tx1"/>
+                </a:solidFill>
+                <a:latin typeface="Arial" panose="020B0604020202020204" pitchFamily="34" charset="0"/>
+                <a:cs typeface="Arial" panose="020B0604020202020204" pitchFamily="34" charset="0"/>
+              </a:rPr>
+              <a:t>É comum a necessidade de se querer filtrar dados a partir de uma lista, por exemplo: queremos saber os clientes do sul do Brasil, para isso teríamos que buscar os clientes cujo estado são ‘RS’, ‘SC’ ou ‘PR’, para tratar lista o SQL nos traz os operadores IN e NOT IN</a:t>
+            </a:r>
+          </a:p>
+        </p:txBody>
+      </p:sp>
+    </p:spTree>
+    <p:extLst>
+      <p:ext uri="{BB962C8B-B14F-4D97-AF65-F5344CB8AC3E}">
+        <p14:creationId xmlns:p14="http://schemas.microsoft.com/office/powerpoint/2010/main" val="3409494020"/>
+      </p:ext>
+    </p:extLst>
+  </p:cSld>
+  <p:clrMapOvr>
+    <a:masterClrMapping/>
+  </p:clrMapOvr>
+  <p:timing>
+    <p:tnLst>
+      <p:par>
+        <p:cTn id="1" dur="indefinite" restart="never" nodeType="tmRoot">
+          <p:childTnLst>
+            <p:seq concurrent="1" nextAc="seek">
+              <p:cTn id="2" dur="indefinite" nodeType="mainSeq">
+                <p:childTnLst>
+                  <p:par>
+                    <p:cTn id="3" fill="hold">
+                      <p:stCondLst>
+                        <p:cond delay="indefinite"/>
+                        <p:cond evt="onBegin" delay="0">
+                          <p:tn val="2"/>
+                        </p:cond>
+                      </p:stCondLst>
+                      <p:childTnLst>
+                        <p:par>
+                          <p:cTn id="4" fill="hold">
+                            <p:stCondLst>
+                              <p:cond delay="0"/>
+                            </p:stCondLst>
+                            <p:childTnLst>
+                              <p:par>
+                                <p:cTn id="5" presetID="1" presetClass="entr" presetSubtype="0" fill="hold" grpId="0" nodeType="withEffect">
+                                  <p:stCondLst>
+                                    <p:cond delay="0"/>
+                                  </p:stCondLst>
+                                  <p:childTnLst>
+                                    <p:set>
+                                      <p:cBhvr>
+                                        <p:cTn id="6" dur="1" fill="hold">
+                                          <p:stCondLst>
+                                            <p:cond delay="0"/>
+                                          </p:stCondLst>
+                                        </p:cTn>
+                                        <p:tgtEl>
+                                          <p:spTgt spid="6"/>
+                                        </p:tgtEl>
+                                        <p:attrNameLst>
+                                          <p:attrName>style.visibility</p:attrName>
+                                        </p:attrNameLst>
+                                      </p:cBhvr>
+                                      <p:to>
+                                        <p:strVal val="visible"/>
+                                      </p:to>
+                                    </p:set>
+                                  </p:childTnLst>
+                                </p:cTn>
+                              </p:par>
+                            </p:childTnLst>
+                          </p:cTn>
+                        </p:par>
+                      </p:childTnLst>
+                    </p:cTn>
+                  </p:par>
+                </p:childTnLst>
+              </p:cTn>
+              <p:prevCondLst>
+                <p:cond evt="onPrev" delay="0">
+                  <p:tgtEl>
+                    <p:sldTgt/>
+                  </p:tgtEl>
+                </p:cond>
+              </p:prevCondLst>
+              <p:nextCondLst>
+                <p:cond evt="onNext" delay="0">
+                  <p:tgtEl>
+                    <p:sldTgt/>
+                  </p:tgtEl>
+                </p:cond>
+              </p:nextCondLst>
+            </p:seq>
+          </p:childTnLst>
+        </p:cTn>
+      </p:par>
+    </p:tnLst>
+    <p:bldLst>
+      <p:bldP spid="6" grpId="0"/>
+    </p:bldLst>
+  </p:timing>
+</p:sld>
+</file>
+
+<file path=ppt/slides/slide58.xml><?xml version="1.0" encoding="utf-8"?>
+<p:sld xmlns:a="http://schemas.openxmlformats.org/drawingml/2006/main" xmlns:r="http://schemas.openxmlformats.org/officeDocument/2006/relationships" xmlns:p="http://schemas.openxmlformats.org/presentationml/2006/main">
+  <p:cSld>
+    <p:spTree>
+      <p:nvGrpSpPr>
+        <p:cNvPr id="1" name="">
+          <a:extLst>
+            <a:ext uri="{FF2B5EF4-FFF2-40B4-BE49-F238E27FC236}">
+              <a16:creationId xmlns:a16="http://schemas.microsoft.com/office/drawing/2014/main" id="{78449555-59DE-6E76-3EAD-7AD8A7849DCE}"/>
+            </a:ext>
+          </a:extLst>
+        </p:cNvPr>
+        <p:cNvGrpSpPr/>
+        <p:nvPr/>
+      </p:nvGrpSpPr>
+      <p:grpSpPr>
+        <a:xfrm>
+          <a:off x="0" y="0"/>
+          <a:ext cx="0" cy="0"/>
+          <a:chOff x="0" y="0"/>
+          <a:chExt cx="0" cy="0"/>
+        </a:xfrm>
+      </p:grpSpPr>
+      <p:sp>
+        <p:nvSpPr>
+          <p:cNvPr id="19" name="CaixaDeTexto 18">
+            <a:extLst>
+              <a:ext uri="{FF2B5EF4-FFF2-40B4-BE49-F238E27FC236}">
+                <a16:creationId xmlns:a16="http://schemas.microsoft.com/office/drawing/2014/main" id="{AA1FF67C-05FF-B6FE-7103-A9D54A5F44DD}"/>
+              </a:ext>
+            </a:extLst>
+          </p:cNvPr>
+          <p:cNvSpPr txBox="1"/>
+          <p:nvPr/>
+        </p:nvSpPr>
+        <p:spPr>
+          <a:xfrm>
+            <a:off x="955954" y="101183"/>
+            <a:ext cx="7567041" cy="461665"/>
+          </a:xfrm>
+          <a:prstGeom prst="rect">
+            <a:avLst/>
+          </a:prstGeom>
+          <a:noFill/>
+        </p:spPr>
+        <p:txBody>
+          <a:bodyPr wrap="square">
+            <a:spAutoFit/>
+          </a:bodyPr>
+          <a:lstStyle/>
+          <a:p>
+            <a:r>
+              <a:rPr lang="en-US" sz="2400" b="1" i="1" dirty="0">
+                <a:solidFill>
+                  <a:srgbClr val="0033CC"/>
+                </a:solidFill>
+                <a:latin typeface="Verdana" panose="020B0604030504040204" pitchFamily="34" charset="0"/>
+              </a:rPr>
+              <a:t>O </a:t>
+            </a:r>
+            <a:r>
+              <a:rPr lang="en-US" sz="2400" b="1" i="1" dirty="0" err="1">
+                <a:solidFill>
+                  <a:srgbClr val="0033CC"/>
+                </a:solidFill>
+                <a:latin typeface="Verdana" panose="020B0604030504040204" pitchFamily="34" charset="0"/>
+              </a:rPr>
+              <a:t>Comando</a:t>
+            </a:r>
+            <a:r>
+              <a:rPr lang="en-US" sz="2400" b="1" i="1" dirty="0">
+                <a:solidFill>
+                  <a:srgbClr val="0033CC"/>
+                </a:solidFill>
+                <a:latin typeface="Verdana" panose="020B0604030504040204" pitchFamily="34" charset="0"/>
+              </a:rPr>
+              <a:t> SELECT</a:t>
+            </a:r>
+            <a:endParaRPr lang="pt-BR" sz="2400" b="1" i="1" dirty="0">
+              <a:solidFill>
+                <a:srgbClr val="0033CC"/>
+              </a:solidFill>
+              <a:latin typeface="Verdana" panose="020B0604030504040204" pitchFamily="34" charset="0"/>
+            </a:endParaRPr>
+          </a:p>
+        </p:txBody>
+      </p:sp>
+      <p:sp>
+        <p:nvSpPr>
+          <p:cNvPr id="6" name="CaixaDeTexto 5">
+            <a:extLst>
+              <a:ext uri="{FF2B5EF4-FFF2-40B4-BE49-F238E27FC236}">
+                <a16:creationId xmlns:a16="http://schemas.microsoft.com/office/drawing/2014/main" id="{67236164-1451-CCE2-028B-A00B45FAAF23}"/>
+              </a:ext>
+            </a:extLst>
+          </p:cNvPr>
+          <p:cNvSpPr txBox="1"/>
+          <p:nvPr/>
+        </p:nvSpPr>
+        <p:spPr>
+          <a:xfrm>
+            <a:off x="799199" y="758782"/>
+            <a:ext cx="7880549" cy="4093428"/>
+          </a:xfrm>
+          <a:prstGeom prst="rect">
+            <a:avLst/>
+          </a:prstGeom>
+          <a:noFill/>
+        </p:spPr>
+        <p:txBody>
+          <a:bodyPr wrap="square">
+            <a:spAutoFit/>
+          </a:bodyPr>
+          <a:lstStyle/>
+          <a:p>
+            <a:pPr algn="just"/>
+            <a:r>
+              <a:rPr lang="pt-BR" sz="2000" dirty="0">
+                <a:solidFill>
+                  <a:schemeClr val="tx1"/>
+                </a:solidFill>
+                <a:latin typeface="Arial" panose="020B0604020202020204" pitchFamily="34" charset="0"/>
+                <a:cs typeface="Arial" panose="020B0604020202020204" pitchFamily="34" charset="0"/>
+              </a:rPr>
+              <a:t>É comum necessitarmos informações que estão em nossa base de dados como filtro, ou mesmos para análises mais complexas, neste caso podemos usar o conceito e </a:t>
+            </a:r>
+            <a:r>
+              <a:rPr lang="pt-BR" sz="2000" dirty="0" err="1">
+                <a:solidFill>
+                  <a:schemeClr val="tx1"/>
+                </a:solidFill>
+                <a:latin typeface="Arial" panose="020B0604020202020204" pitchFamily="34" charset="0"/>
+                <a:cs typeface="Arial" panose="020B0604020202020204" pitchFamily="34" charset="0"/>
+              </a:rPr>
+              <a:t>subselect</a:t>
+            </a:r>
+            <a:r>
+              <a:rPr lang="pt-BR" sz="2000" dirty="0">
+                <a:solidFill>
+                  <a:schemeClr val="tx1"/>
+                </a:solidFill>
+                <a:latin typeface="Arial" panose="020B0604020202020204" pitchFamily="34" charset="0"/>
+                <a:cs typeface="Arial" panose="020B0604020202020204" pitchFamily="34" charset="0"/>
+              </a:rPr>
+              <a:t>, ou seja, usar um comando de SELECT dentro de outro de outro comando SELECT.</a:t>
+            </a:r>
+          </a:p>
+          <a:p>
+            <a:pPr algn="just"/>
+            <a:endParaRPr lang="pt-BR" sz="2000" dirty="0">
+              <a:solidFill>
+                <a:schemeClr val="tx1"/>
+              </a:solidFill>
+              <a:latin typeface="Arial" panose="020B0604020202020204" pitchFamily="34" charset="0"/>
+              <a:cs typeface="Arial" panose="020B0604020202020204" pitchFamily="34" charset="0"/>
+            </a:endParaRPr>
+          </a:p>
+          <a:p>
+            <a:pPr algn="just"/>
+            <a:r>
+              <a:rPr lang="pt-BR" sz="2000" dirty="0">
+                <a:solidFill>
+                  <a:schemeClr val="tx1"/>
+                </a:solidFill>
+                <a:latin typeface="Arial" panose="020B0604020202020204" pitchFamily="34" charset="0"/>
+                <a:cs typeface="Arial" panose="020B0604020202020204" pitchFamily="34" charset="0"/>
+              </a:rPr>
+              <a:t>Todo o resultado de um comando SELECT pode ser utilizado como filtros ou até mesmo como uma tabela temporária que pode ser usada no FROM de outro comando SELECT</a:t>
+            </a:r>
+          </a:p>
+          <a:p>
+            <a:pPr algn="just"/>
+            <a:endParaRPr lang="pt-BR" sz="2000" dirty="0">
+              <a:solidFill>
+                <a:schemeClr val="tx1"/>
+              </a:solidFill>
+              <a:latin typeface="Arial" panose="020B0604020202020204" pitchFamily="34" charset="0"/>
+              <a:cs typeface="Arial" panose="020B0604020202020204" pitchFamily="34" charset="0"/>
+            </a:endParaRPr>
+          </a:p>
+          <a:p>
+            <a:pPr algn="just"/>
+            <a:r>
+              <a:rPr lang="pt-BR" sz="2000" dirty="0">
+                <a:solidFill>
+                  <a:schemeClr val="tx1"/>
+                </a:solidFill>
+                <a:latin typeface="Arial" panose="020B0604020202020204" pitchFamily="34" charset="0"/>
+                <a:cs typeface="Arial" panose="020B0604020202020204" pitchFamily="34" charset="0"/>
+              </a:rPr>
+              <a:t>Esta possibilidade pode gerar comandos de SELECT complexos e com dificuldade de entendimento, o SQL nos oferece então o objeto VIEW que podemos dizer um nome dado a um SELECT, este objeto pode ser trabalhado como se fosse uma nova tabela</a:t>
+            </a:r>
+          </a:p>
+        </p:txBody>
+      </p:sp>
+    </p:spTree>
+    <p:extLst>
+      <p:ext uri="{BB962C8B-B14F-4D97-AF65-F5344CB8AC3E}">
+        <p14:creationId xmlns:p14="http://schemas.microsoft.com/office/powerpoint/2010/main" val="1898723721"/>
       </p:ext>
     </p:extLst>
   </p:cSld>

--- a/Apresentação/sql.pptx
+++ b/Apresentação/sql.pptx
@@ -5,10 +5,10 @@
     <p:sldMasterId id="2147483666" r:id="rId1"/>
   </p:sldMasterIdLst>
   <p:notesMasterIdLst>
-    <p:notesMasterId r:id="rId60"/>
+    <p:notesMasterId r:id="rId61"/>
   </p:notesMasterIdLst>
   <p:handoutMasterIdLst>
-    <p:handoutMasterId r:id="rId61"/>
+    <p:handoutMasterId r:id="rId62"/>
   </p:handoutMasterIdLst>
   <p:sldIdLst>
     <p:sldId id="2526" r:id="rId2"/>
@@ -69,41 +69,42 @@
     <p:sldId id="3210" r:id="rId57"/>
     <p:sldId id="3211" r:id="rId58"/>
     <p:sldId id="3212" r:id="rId59"/>
+    <p:sldId id="3213" r:id="rId60"/>
   </p:sldIdLst>
   <p:sldSz cx="9144000" cy="5143500" type="screen16x9"/>
   <p:notesSz cx="6858000" cy="9945688"/>
   <p:embeddedFontLst>
     <p:embeddedFont>
       <p:font typeface="Arial Unicode MS" panose="020B0604020202020204" charset="-128"/>
-      <p:regular r:id="rId62"/>
+      <p:regular r:id="rId63"/>
     </p:embeddedFont>
     <p:embeddedFont>
       <p:font typeface="Consolas" panose="020B0609020204030204" pitchFamily="49" charset="0"/>
-      <p:regular r:id="rId63"/>
-      <p:bold r:id="rId64"/>
-      <p:italic r:id="rId65"/>
-      <p:boldItalic r:id="rId66"/>
+      <p:regular r:id="rId64"/>
+      <p:bold r:id="rId65"/>
+      <p:italic r:id="rId66"/>
+      <p:boldItalic r:id="rId67"/>
     </p:embeddedFont>
     <p:embeddedFont>
       <p:font typeface="Roboto" panose="02000000000000000000" pitchFamily="2" charset="0"/>
-      <p:regular r:id="rId67"/>
-      <p:bold r:id="rId68"/>
-      <p:italic r:id="rId69"/>
-      <p:boldItalic r:id="rId70"/>
+      <p:regular r:id="rId68"/>
+      <p:bold r:id="rId69"/>
+      <p:italic r:id="rId70"/>
+      <p:boldItalic r:id="rId71"/>
     </p:embeddedFont>
     <p:embeddedFont>
       <p:font typeface="Times" panose="02020603050405020304" pitchFamily="18" charset="0"/>
-      <p:regular r:id="rId71"/>
-      <p:bold r:id="rId72"/>
-      <p:italic r:id="rId73"/>
-      <p:boldItalic r:id="rId74"/>
+      <p:regular r:id="rId72"/>
+      <p:bold r:id="rId73"/>
+      <p:italic r:id="rId74"/>
+      <p:boldItalic r:id="rId75"/>
     </p:embeddedFont>
     <p:embeddedFont>
       <p:font typeface="Verdana" panose="020B0604030504040204" pitchFamily="34" charset="0"/>
-      <p:regular r:id="rId75"/>
-      <p:bold r:id="rId76"/>
-      <p:italic r:id="rId77"/>
-      <p:boldItalic r:id="rId78"/>
+      <p:regular r:id="rId76"/>
+      <p:bold r:id="rId77"/>
+      <p:italic r:id="rId78"/>
+      <p:boldItalic r:id="rId79"/>
     </p:embeddedFont>
   </p:embeddedFontLst>
   <p:defaultTextStyle>
@@ -398,6 +399,7 @@
             <p14:sldId id="3210"/>
             <p14:sldId id="3211"/>
             <p14:sldId id="3212"/>
+            <p14:sldId id="3213"/>
           </p14:sldIdLst>
         </p14:section>
       </p14:sectionLst>
@@ -34401,6 +34403,266 @@
 </p:sld>
 </file>
 
+<file path=ppt/slides/slide59.xml><?xml version="1.0" encoding="utf-8"?>
+<p:sld xmlns:a="http://schemas.openxmlformats.org/drawingml/2006/main" xmlns:r="http://schemas.openxmlformats.org/officeDocument/2006/relationships" xmlns:p="http://schemas.openxmlformats.org/presentationml/2006/main">
+  <p:cSld>
+    <p:spTree>
+      <p:nvGrpSpPr>
+        <p:cNvPr id="1" name="">
+          <a:extLst>
+            <a:ext uri="{FF2B5EF4-FFF2-40B4-BE49-F238E27FC236}">
+              <a16:creationId xmlns:a16="http://schemas.microsoft.com/office/drawing/2014/main" id="{17E4E716-DD20-76D2-7D08-26ABC13AC842}"/>
+            </a:ext>
+          </a:extLst>
+        </p:cNvPr>
+        <p:cNvGrpSpPr/>
+        <p:nvPr/>
+      </p:nvGrpSpPr>
+      <p:grpSpPr>
+        <a:xfrm>
+          <a:off x="0" y="0"/>
+          <a:ext cx="0" cy="0"/>
+          <a:chOff x="0" y="0"/>
+          <a:chExt cx="0" cy="0"/>
+        </a:xfrm>
+      </p:grpSpPr>
+      <p:sp>
+        <p:nvSpPr>
+          <p:cNvPr id="19" name="CaixaDeTexto 18">
+            <a:extLst>
+              <a:ext uri="{FF2B5EF4-FFF2-40B4-BE49-F238E27FC236}">
+                <a16:creationId xmlns:a16="http://schemas.microsoft.com/office/drawing/2014/main" id="{A84CCC08-4671-344A-D6BF-B929E63F56BE}"/>
+              </a:ext>
+            </a:extLst>
+          </p:cNvPr>
+          <p:cNvSpPr txBox="1"/>
+          <p:nvPr/>
+        </p:nvSpPr>
+        <p:spPr>
+          <a:xfrm>
+            <a:off x="955954" y="101183"/>
+            <a:ext cx="7567041" cy="461665"/>
+          </a:xfrm>
+          <a:prstGeom prst="rect">
+            <a:avLst/>
+          </a:prstGeom>
+          <a:noFill/>
+        </p:spPr>
+        <p:txBody>
+          <a:bodyPr wrap="square">
+            <a:spAutoFit/>
+          </a:bodyPr>
+          <a:lstStyle/>
+          <a:p>
+            <a:r>
+              <a:rPr lang="en-US" sz="2400" b="1" i="1" dirty="0">
+                <a:solidFill>
+                  <a:srgbClr val="0033CC"/>
+                </a:solidFill>
+                <a:latin typeface="Verdana" panose="020B0604030504040204" pitchFamily="34" charset="0"/>
+              </a:rPr>
+              <a:t>O </a:t>
+            </a:r>
+            <a:r>
+              <a:rPr lang="en-US" sz="2400" b="1" i="1" dirty="0" err="1">
+                <a:solidFill>
+                  <a:srgbClr val="0033CC"/>
+                </a:solidFill>
+                <a:latin typeface="Verdana" panose="020B0604030504040204" pitchFamily="34" charset="0"/>
+              </a:rPr>
+              <a:t>Comando</a:t>
+            </a:r>
+            <a:r>
+              <a:rPr lang="en-US" sz="2400" b="1" i="1" dirty="0">
+                <a:solidFill>
+                  <a:srgbClr val="0033CC"/>
+                </a:solidFill>
+                <a:latin typeface="Verdana" panose="020B0604030504040204" pitchFamily="34" charset="0"/>
+              </a:rPr>
+              <a:t> SELECT</a:t>
+            </a:r>
+            <a:endParaRPr lang="pt-BR" sz="2400" b="1" i="1" dirty="0">
+              <a:solidFill>
+                <a:srgbClr val="0033CC"/>
+              </a:solidFill>
+              <a:latin typeface="Verdana" panose="020B0604030504040204" pitchFamily="34" charset="0"/>
+            </a:endParaRPr>
+          </a:p>
+        </p:txBody>
+      </p:sp>
+      <p:sp>
+        <p:nvSpPr>
+          <p:cNvPr id="6" name="CaixaDeTexto 5">
+            <a:extLst>
+              <a:ext uri="{FF2B5EF4-FFF2-40B4-BE49-F238E27FC236}">
+                <a16:creationId xmlns:a16="http://schemas.microsoft.com/office/drawing/2014/main" id="{7634F158-BB87-FD65-A2F0-6F835FC257AA}"/>
+              </a:ext>
+            </a:extLst>
+          </p:cNvPr>
+          <p:cNvSpPr txBox="1"/>
+          <p:nvPr/>
+        </p:nvSpPr>
+        <p:spPr>
+          <a:xfrm>
+            <a:off x="799199" y="758782"/>
+            <a:ext cx="7880549" cy="1323439"/>
+          </a:xfrm>
+          <a:prstGeom prst="rect">
+            <a:avLst/>
+          </a:prstGeom>
+          <a:noFill/>
+        </p:spPr>
+        <p:txBody>
+          <a:bodyPr wrap="square">
+            <a:spAutoFit/>
+          </a:bodyPr>
+          <a:lstStyle/>
+          <a:p>
+            <a:pPr algn="just"/>
+            <a:r>
+              <a:rPr lang="pt-BR" sz="2000" dirty="0">
+                <a:solidFill>
+                  <a:schemeClr val="tx1"/>
+                </a:solidFill>
+                <a:latin typeface="Arial" panose="020B0604020202020204" pitchFamily="34" charset="0"/>
+                <a:cs typeface="Arial" panose="020B0604020202020204" pitchFamily="34" charset="0"/>
+              </a:rPr>
+              <a:t>Outra situação relativamente comum é quando juntar dados de </a:t>
+            </a:r>
+            <a:r>
+              <a:rPr lang="pt-BR" sz="2000" dirty="0" err="1">
+                <a:solidFill>
+                  <a:schemeClr val="tx1"/>
+                </a:solidFill>
+                <a:latin typeface="Arial" panose="020B0604020202020204" pitchFamily="34" charset="0"/>
+                <a:cs typeface="Arial" panose="020B0604020202020204" pitchFamily="34" charset="0"/>
+              </a:rPr>
+              <a:t>selects</a:t>
+            </a:r>
+            <a:r>
+              <a:rPr lang="pt-BR" sz="2000" dirty="0">
+                <a:solidFill>
+                  <a:schemeClr val="tx1"/>
+                </a:solidFill>
+                <a:latin typeface="Arial" panose="020B0604020202020204" pitchFamily="34" charset="0"/>
+                <a:cs typeface="Arial" panose="020B0604020202020204" pitchFamily="34" charset="0"/>
+              </a:rPr>
+              <a:t> diferentes em um único SELEC, ou seja, queremos unir os resultados, para isso o SQL nos traz </a:t>
+            </a:r>
+            <a:r>
+              <a:rPr lang="pt-BR" sz="2000">
+                <a:solidFill>
+                  <a:schemeClr val="tx1"/>
+                </a:solidFill>
+                <a:latin typeface="Arial" panose="020B0604020202020204" pitchFamily="34" charset="0"/>
+                <a:cs typeface="Arial" panose="020B0604020202020204" pitchFamily="34" charset="0"/>
+              </a:rPr>
+              <a:t>a clausula UNION ou UNION ALL.</a:t>
+            </a:r>
+            <a:endParaRPr lang="pt-BR" sz="2000" dirty="0">
+              <a:solidFill>
+                <a:schemeClr val="tx1"/>
+              </a:solidFill>
+              <a:latin typeface="Arial" panose="020B0604020202020204" pitchFamily="34" charset="0"/>
+              <a:cs typeface="Arial" panose="020B0604020202020204" pitchFamily="34" charset="0"/>
+            </a:endParaRPr>
+          </a:p>
+        </p:txBody>
+      </p:sp>
+    </p:spTree>
+    <p:extLst>
+      <p:ext uri="{BB962C8B-B14F-4D97-AF65-F5344CB8AC3E}">
+        <p14:creationId xmlns:p14="http://schemas.microsoft.com/office/powerpoint/2010/main" val="3837391249"/>
+      </p:ext>
+    </p:extLst>
+  </p:cSld>
+  <p:clrMapOvr>
+    <a:masterClrMapping/>
+  </p:clrMapOvr>
+  <p:timing>
+    <p:tnLst>
+      <p:par>
+        <p:cTn id="1" dur="indefinite" restart="never" nodeType="tmRoot">
+          <p:childTnLst>
+            <p:seq concurrent="1" nextAc="seek">
+              <p:cTn id="2" dur="indefinite" nodeType="mainSeq">
+                <p:childTnLst>
+                  <p:par>
+                    <p:cTn id="3" fill="hold">
+                      <p:stCondLst>
+                        <p:cond delay="indefinite"/>
+                        <p:cond evt="onBegin" delay="0">
+                          <p:tn val="2"/>
+                        </p:cond>
+                      </p:stCondLst>
+                      <p:childTnLst>
+                        <p:par>
+                          <p:cTn id="4" fill="hold">
+                            <p:stCondLst>
+                              <p:cond delay="0"/>
+                            </p:stCondLst>
+                            <p:childTnLst>
+                              <p:par>
+                                <p:cTn id="5" presetID="1" presetClass="entr" presetSubtype="0" fill="hold" grpId="0" nodeType="withEffect">
+                                  <p:stCondLst>
+                                    <p:cond delay="0"/>
+                                  </p:stCondLst>
+                                  <p:childTnLst>
+                                    <p:set>
+                                      <p:cBhvr>
+                                        <p:cTn id="6" dur="1" fill="hold">
+                                          <p:stCondLst>
+                                            <p:cond delay="0"/>
+                                          </p:stCondLst>
+                                        </p:cTn>
+                                        <p:tgtEl>
+                                          <p:spTgt spid="6"/>
+                                        </p:tgtEl>
+                                        <p:attrNameLst>
+                                          <p:attrName>style.visibility</p:attrName>
+                                        </p:attrNameLst>
+                                      </p:cBhvr>
+                                      <p:to>
+                                        <p:strVal val="visible"/>
+                                      </p:to>
+                                    </p:set>
+                                  </p:childTnLst>
+                                </p:cTn>
+                              </p:par>
+                            </p:childTnLst>
+                          </p:cTn>
+                        </p:par>
+                      </p:childTnLst>
+                    </p:cTn>
+                  </p:par>
+                </p:childTnLst>
+              </p:cTn>
+              <p:prevCondLst>
+                <p:cond evt="onPrev" delay="0">
+                  <p:tgtEl>
+                    <p:sldTgt/>
+                  </p:tgtEl>
+                </p:cond>
+              </p:prevCondLst>
+              <p:nextCondLst>
+                <p:cond evt="onNext" delay="0">
+                  <p:tgtEl>
+                    <p:sldTgt/>
+                  </p:tgtEl>
+                </p:cond>
+              </p:nextCondLst>
+            </p:seq>
+          </p:childTnLst>
+        </p:cTn>
+      </p:par>
+    </p:tnLst>
+    <p:bldLst>
+      <p:bldP spid="6" grpId="0"/>
+    </p:bldLst>
+  </p:timing>
+</p:sld>
+</file>
+
 <file path=ppt/slides/slide6.xml><?xml version="1.0" encoding="utf-8"?>
 <p:sld xmlns:a="http://schemas.openxmlformats.org/drawingml/2006/main" xmlns:r="http://schemas.openxmlformats.org/officeDocument/2006/relationships" xmlns:p="http://schemas.openxmlformats.org/presentationml/2006/main">
   <p:cSld>

--- a/Apresentação/sql.pptx
+++ b/Apresentação/sql.pptx
@@ -32221,7 +32221,7 @@
         <p:spPr>
           <a:xfrm>
             <a:off x="879753" y="820255"/>
-            <a:ext cx="7880549" cy="4708981"/>
+            <a:ext cx="7880549" cy="4555093"/>
           </a:xfrm>
           <a:prstGeom prst="rect">
             <a:avLst/>
@@ -32245,27 +32245,7 @@
                 <a:latin typeface="Arial" panose="020B0604020202020204" pitchFamily="34" charset="0"/>
                 <a:cs typeface="Arial" panose="020B0604020202020204" pitchFamily="34" charset="0"/>
               </a:rPr>
-              <a:t>Incluir a categoria “´Áudio e </a:t>
-            </a:r>
-            <a:r>
-              <a:rPr lang="pt-BR" sz="2000" dirty="0" err="1">
-                <a:solidFill>
-                  <a:schemeClr val="tx1"/>
-                </a:solidFill>
-                <a:latin typeface="Arial" panose="020B0604020202020204" pitchFamily="34" charset="0"/>
-                <a:cs typeface="Arial" panose="020B0604020202020204" pitchFamily="34" charset="0"/>
-              </a:rPr>
-              <a:t>Asom</a:t>
-            </a:r>
-            <a:r>
-              <a:rPr lang="pt-BR" sz="2000" dirty="0">
-                <a:solidFill>
-                  <a:schemeClr val="tx1"/>
-                </a:solidFill>
-                <a:latin typeface="Arial" panose="020B0604020202020204" pitchFamily="34" charset="0"/>
-                <a:cs typeface="Arial" panose="020B0604020202020204" pitchFamily="34" charset="0"/>
-              </a:rPr>
-              <a:t>” com id = 22 e com a descrição </a:t>
+              <a:t>Incluir a categoria “´Áudio e Som” com id = 22 e com a descrição </a:t>
             </a:r>
             <a:r>
               <a:rPr lang="pt-BR" sz="2000" dirty="0"/>
@@ -32637,7 +32617,7 @@
                 <a:latin typeface="Arial" panose="020B0604020202020204" pitchFamily="34" charset="0"/>
                 <a:cs typeface="Arial" panose="020B0604020202020204" pitchFamily="34" charset="0"/>
               </a:rPr>
-              <a:t>5) Altere o nome do usuário 435983 para Silvano Carlos Menezes</a:t>
+              <a:t>5) Altere o nome do cliente  435983 para Silvano Carlos Menezes</a:t>
             </a:r>
             <a:endParaRPr lang="pt-BR" sz="2000" dirty="0"/>
           </a:p>
